--- a/txt2phrases/Presentation.pptx
+++ b/txt2phrases/Presentation.pptx
@@ -10,9 +10,12 @@
     <p:sldId id="257" r:id="rId4"/>
     <p:sldId id="260" r:id="rId5"/>
     <p:sldId id="258" r:id="rId6"/>
-    <p:sldId id="259" r:id="rId7"/>
-    <p:sldId id="261" r:id="rId8"/>
-    <p:sldId id="262" r:id="rId9"/>
+    <p:sldId id="265" r:id="rId7"/>
+    <p:sldId id="259" r:id="rId8"/>
+    <p:sldId id="261" r:id="rId9"/>
+    <p:sldId id="262" r:id="rId10"/>
+    <p:sldId id="266" r:id="rId11"/>
+    <p:sldId id="264" r:id="rId12"/>
   </p:sldIdLst>
   <p:sldSz cx="12192000" cy="6858000"/>
   <p:notesSz cx="6858000" cy="9144000"/>
@@ -123,8 +126,8 @@
 <pc:chgInfo xmlns:a="http://schemas.openxmlformats.org/drawingml/2006/main" xmlns:r="http://schemas.openxmlformats.org/officeDocument/2006/relationships" xmlns:ac="http://schemas.microsoft.com/office/drawing/2013/main/command" xmlns:pc="http://schemas.microsoft.com/office/powerpoint/2013/main/command">
   <pc:docChgLst>
     <pc:chgData name="sakshi gupta" userId="fe7bf80378c01198" providerId="LiveId" clId="{CD3F5599-86B3-47FA-A744-D924C6D1A3CF}"/>
-    <pc:docChg chg="custSel addSld modSld">
-      <pc:chgData name="sakshi gupta" userId="fe7bf80378c01198" providerId="LiveId" clId="{CD3F5599-86B3-47FA-A744-D924C6D1A3CF}" dt="2026-02-23T15:54:44.147" v="595" actId="12"/>
+    <pc:docChg chg="custSel addSld delSld modSld">
+      <pc:chgData name="sakshi gupta" userId="fe7bf80378c01198" providerId="LiveId" clId="{CD3F5599-86B3-47FA-A744-D924C6D1A3CF}" dt="2026-02-25T05:50:03.160" v="650" actId="12"/>
       <pc:docMkLst>
         <pc:docMk/>
       </pc:docMkLst>
@@ -144,13 +147,13 @@
         </pc:spChg>
       </pc:sldChg>
       <pc:sldChg chg="modSp mod">
-        <pc:chgData name="sakshi gupta" userId="fe7bf80378c01198" providerId="LiveId" clId="{CD3F5599-86B3-47FA-A744-D924C6D1A3CF}" dt="2026-02-23T15:51:23.753" v="520" actId="12"/>
+        <pc:chgData name="sakshi gupta" userId="fe7bf80378c01198" providerId="LiveId" clId="{CD3F5599-86B3-47FA-A744-D924C6D1A3CF}" dt="2026-02-25T05:50:03.160" v="650" actId="12"/>
         <pc:sldMkLst>
           <pc:docMk/>
           <pc:sldMk cId="3109307636" sldId="258"/>
         </pc:sldMkLst>
         <pc:spChg chg="mod">
-          <ac:chgData name="sakshi gupta" userId="fe7bf80378c01198" providerId="LiveId" clId="{CD3F5599-86B3-47FA-A744-D924C6D1A3CF}" dt="2026-02-23T15:51:23.753" v="520" actId="12"/>
+          <ac:chgData name="sakshi gupta" userId="fe7bf80378c01198" providerId="LiveId" clId="{CD3F5599-86B3-47FA-A744-D924C6D1A3CF}" dt="2026-02-25T05:50:03.160" v="650" actId="12"/>
           <ac:spMkLst>
             <pc:docMk/>
             <pc:sldMk cId="3109307636" sldId="258"/>
@@ -159,13 +162,13 @@
         </pc:spChg>
       </pc:sldChg>
       <pc:sldChg chg="modSp mod">
-        <pc:chgData name="sakshi gupta" userId="fe7bf80378c01198" providerId="LiveId" clId="{CD3F5599-86B3-47FA-A744-D924C6D1A3CF}" dt="2026-02-23T15:52:38.573" v="585" actId="14100"/>
+        <pc:chgData name="sakshi gupta" userId="fe7bf80378c01198" providerId="LiveId" clId="{CD3F5599-86B3-47FA-A744-D924C6D1A3CF}" dt="2026-02-25T05:49:51.902" v="649" actId="27636"/>
         <pc:sldMkLst>
           <pc:docMk/>
           <pc:sldMk cId="7422783" sldId="259"/>
         </pc:sldMkLst>
         <pc:spChg chg="mod">
-          <ac:chgData name="sakshi gupta" userId="fe7bf80378c01198" providerId="LiveId" clId="{CD3F5599-86B3-47FA-A744-D924C6D1A3CF}" dt="2026-02-23T15:52:27.429" v="583" actId="20577"/>
+          <ac:chgData name="sakshi gupta" userId="fe7bf80378c01198" providerId="LiveId" clId="{CD3F5599-86B3-47FA-A744-D924C6D1A3CF}" dt="2026-02-25T05:49:51.902" v="649" actId="27636"/>
           <ac:spMkLst>
             <pc:docMk/>
             <pc:sldMk cId="7422783" sldId="259"/>
@@ -210,14 +213,6 @@
             <ac:spMk id="2" creationId="{843BC07F-4A64-329F-7F7A-4ECFAB3B8DBB}"/>
           </ac:spMkLst>
         </pc:spChg>
-        <pc:spChg chg="del">
-          <ac:chgData name="sakshi gupta" userId="fe7bf80378c01198" providerId="LiveId" clId="{CD3F5599-86B3-47FA-A744-D924C6D1A3CF}" dt="2026-02-23T07:56:15.330" v="17" actId="931"/>
-          <ac:spMkLst>
-            <pc:docMk/>
-            <pc:sldMk cId="2919700871" sldId="261"/>
-            <ac:spMk id="3" creationId="{1E673647-599D-F836-95C0-3C4C1332A50E}"/>
-          </ac:spMkLst>
-        </pc:spChg>
         <pc:picChg chg="add mod ord">
           <ac:chgData name="sakshi gupta" userId="fe7bf80378c01198" providerId="LiveId" clId="{CD3F5599-86B3-47FA-A744-D924C6D1A3CF}" dt="2026-02-23T07:56:22.438" v="19" actId="14100"/>
           <ac:picMkLst>
@@ -251,7 +246,7 @@
         </pc:spChg>
       </pc:sldChg>
       <pc:sldChg chg="modSp new mod">
-        <pc:chgData name="sakshi gupta" userId="fe7bf80378c01198" providerId="LiveId" clId="{CD3F5599-86B3-47FA-A744-D924C6D1A3CF}" dt="2026-02-23T15:48:18.518" v="389" actId="113"/>
+        <pc:chgData name="sakshi gupta" userId="fe7bf80378c01198" providerId="LiveId" clId="{CD3F5599-86B3-47FA-A744-D924C6D1A3CF}" dt="2026-02-24T08:17:59.787" v="639" actId="20577"/>
         <pc:sldMkLst>
           <pc:docMk/>
           <pc:sldMk cId="2618940872" sldId="263"/>
@@ -265,13 +260,103 @@
           </ac:spMkLst>
         </pc:spChg>
         <pc:spChg chg="mod">
-          <ac:chgData name="sakshi gupta" userId="fe7bf80378c01198" providerId="LiveId" clId="{CD3F5599-86B3-47FA-A744-D924C6D1A3CF}" dt="2026-02-23T15:48:18.518" v="389" actId="113"/>
+          <ac:chgData name="sakshi gupta" userId="fe7bf80378c01198" providerId="LiveId" clId="{CD3F5599-86B3-47FA-A744-D924C6D1A3CF}" dt="2026-02-24T08:17:59.787" v="639" actId="20577"/>
           <ac:spMkLst>
             <pc:docMk/>
             <pc:sldMk cId="2618940872" sldId="263"/>
             <ac:spMk id="3" creationId="{7A175CE9-F6CE-8103-9439-0FBB057C25C3}"/>
           </ac:spMkLst>
         </pc:spChg>
+      </pc:sldChg>
+      <pc:sldChg chg="new del">
+        <pc:chgData name="sakshi gupta" userId="fe7bf80378c01198" providerId="LiveId" clId="{CD3F5599-86B3-47FA-A744-D924C6D1A3CF}" dt="2026-02-24T07:53:48.371" v="597" actId="2696"/>
+        <pc:sldMkLst>
+          <pc:docMk/>
+          <pc:sldMk cId="556642657" sldId="264"/>
+        </pc:sldMkLst>
+      </pc:sldChg>
+      <pc:sldChg chg="addSp delSp modSp new mod">
+        <pc:chgData name="sakshi gupta" userId="fe7bf80378c01198" providerId="LiveId" clId="{CD3F5599-86B3-47FA-A744-D924C6D1A3CF}" dt="2026-02-24T08:00:15.650" v="619" actId="14100"/>
+        <pc:sldMkLst>
+          <pc:docMk/>
+          <pc:sldMk cId="3367923462" sldId="264"/>
+        </pc:sldMkLst>
+        <pc:spChg chg="del">
+          <ac:chgData name="sakshi gupta" userId="fe7bf80378c01198" providerId="LiveId" clId="{CD3F5599-86B3-47FA-A744-D924C6D1A3CF}" dt="2026-02-24T07:56:28.608" v="599" actId="931"/>
+          <ac:spMkLst>
+            <pc:docMk/>
+            <pc:sldMk cId="3367923462" sldId="264"/>
+            <ac:spMk id="3" creationId="{94BA4570-9881-506F-6447-CDC950BAC491}"/>
+          </ac:spMkLst>
+        </pc:spChg>
+        <pc:picChg chg="add mod ord">
+          <ac:chgData name="sakshi gupta" userId="fe7bf80378c01198" providerId="LiveId" clId="{CD3F5599-86B3-47FA-A744-D924C6D1A3CF}" dt="2026-02-24T08:00:15.650" v="619" actId="14100"/>
+          <ac:picMkLst>
+            <pc:docMk/>
+            <pc:sldMk cId="3367923462" sldId="264"/>
+            <ac:picMk id="5" creationId="{D0BA6EF4-BEC9-85A0-E3F9-1BA0683226B5}"/>
+          </ac:picMkLst>
+        </pc:picChg>
+      </pc:sldChg>
+      <pc:sldChg chg="addSp delSp modSp new mod">
+        <pc:chgData name="sakshi gupta" userId="fe7bf80378c01198" providerId="LiveId" clId="{CD3F5599-86B3-47FA-A744-D924C6D1A3CF}" dt="2026-02-24T07:58:44.402" v="616" actId="14100"/>
+        <pc:sldMkLst>
+          <pc:docMk/>
+          <pc:sldMk cId="1154062688" sldId="265"/>
+        </pc:sldMkLst>
+        <pc:spChg chg="del">
+          <ac:chgData name="sakshi gupta" userId="fe7bf80378c01198" providerId="LiveId" clId="{CD3F5599-86B3-47FA-A744-D924C6D1A3CF}" dt="2026-02-24T07:58:12.097" v="609" actId="931"/>
+          <ac:spMkLst>
+            <pc:docMk/>
+            <pc:sldMk cId="1154062688" sldId="265"/>
+            <ac:spMk id="3" creationId="{F5E61013-8776-9D89-2225-1F2C32EBFC42}"/>
+          </ac:spMkLst>
+        </pc:spChg>
+        <pc:picChg chg="add mod ord">
+          <ac:chgData name="sakshi gupta" userId="fe7bf80378c01198" providerId="LiveId" clId="{CD3F5599-86B3-47FA-A744-D924C6D1A3CF}" dt="2026-02-24T07:58:44.402" v="616" actId="14100"/>
+          <ac:picMkLst>
+            <pc:docMk/>
+            <pc:sldMk cId="1154062688" sldId="265"/>
+            <ac:picMk id="5" creationId="{6C82BB36-626D-2C93-3D8B-8A58A22B8845}"/>
+          </ac:picMkLst>
+        </pc:picChg>
+      </pc:sldChg>
+      <pc:sldChg chg="new del">
+        <pc:chgData name="sakshi gupta" userId="fe7bf80378c01198" providerId="LiveId" clId="{CD3F5599-86B3-47FA-A744-D924C6D1A3CF}" dt="2026-02-24T07:57:26.721" v="606" actId="2696"/>
+        <pc:sldMkLst>
+          <pc:docMk/>
+          <pc:sldMk cId="1978460143" sldId="265"/>
+        </pc:sldMkLst>
+      </pc:sldChg>
+      <pc:sldChg chg="new del">
+        <pc:chgData name="sakshi gupta" userId="fe7bf80378c01198" providerId="LiveId" clId="{CD3F5599-86B3-47FA-A744-D924C6D1A3CF}" dt="2026-02-24T07:57:36.365" v="607" actId="2696"/>
+        <pc:sldMkLst>
+          <pc:docMk/>
+          <pc:sldMk cId="597544317" sldId="266"/>
+        </pc:sldMkLst>
+      </pc:sldChg>
+      <pc:sldChg chg="addSp delSp modSp new mod">
+        <pc:chgData name="sakshi gupta" userId="fe7bf80378c01198" providerId="LiveId" clId="{CD3F5599-86B3-47FA-A744-D924C6D1A3CF}" dt="2026-02-24T08:30:03.130" v="645" actId="14100"/>
+        <pc:sldMkLst>
+          <pc:docMk/>
+          <pc:sldMk cId="3995877536" sldId="266"/>
+        </pc:sldMkLst>
+        <pc:spChg chg="del">
+          <ac:chgData name="sakshi gupta" userId="fe7bf80378c01198" providerId="LiveId" clId="{CD3F5599-86B3-47FA-A744-D924C6D1A3CF}" dt="2026-02-24T08:29:48.133" v="641" actId="931"/>
+          <ac:spMkLst>
+            <pc:docMk/>
+            <pc:sldMk cId="3995877536" sldId="266"/>
+            <ac:spMk id="3" creationId="{B662CBC0-F362-4AC6-1434-3C2A56EED030}"/>
+          </ac:spMkLst>
+        </pc:spChg>
+        <pc:picChg chg="add mod ord">
+          <ac:chgData name="sakshi gupta" userId="fe7bf80378c01198" providerId="LiveId" clId="{CD3F5599-86B3-47FA-A744-D924C6D1A3CF}" dt="2026-02-24T08:30:03.130" v="645" actId="14100"/>
+          <ac:picMkLst>
+            <pc:docMk/>
+            <pc:sldMk cId="3995877536" sldId="266"/>
+            <ac:picMk id="5" creationId="{5E243EB6-C73B-F364-4845-8FFB3BA9499A}"/>
+          </ac:picMkLst>
+        </pc:picChg>
       </pc:sldChg>
     </pc:docChg>
   </pc:docChgLst>
@@ -427,7 +512,7 @@
           <a:p>
             <a:fld id="{C4F53AEA-B7DC-4A83-8157-9AF768AB38E4}" type="datetimeFigureOut">
               <a:rPr lang="en-IN" smtClean="0"/>
-              <a:t>23-02-2026</a:t>
+              <a:t>24-02-2026</a:t>
             </a:fld>
             <a:endParaRPr lang="en-IN"/>
           </a:p>
@@ -627,7 +712,7 @@
           <a:p>
             <a:fld id="{C4F53AEA-B7DC-4A83-8157-9AF768AB38E4}" type="datetimeFigureOut">
               <a:rPr lang="en-IN" smtClean="0"/>
-              <a:t>23-02-2026</a:t>
+              <a:t>24-02-2026</a:t>
             </a:fld>
             <a:endParaRPr lang="en-IN"/>
           </a:p>
@@ -837,7 +922,7 @@
           <a:p>
             <a:fld id="{C4F53AEA-B7DC-4A83-8157-9AF768AB38E4}" type="datetimeFigureOut">
               <a:rPr lang="en-IN" smtClean="0"/>
-              <a:t>23-02-2026</a:t>
+              <a:t>24-02-2026</a:t>
             </a:fld>
             <a:endParaRPr lang="en-IN"/>
           </a:p>
@@ -1037,7 +1122,7 @@
           <a:p>
             <a:fld id="{C4F53AEA-B7DC-4A83-8157-9AF768AB38E4}" type="datetimeFigureOut">
               <a:rPr lang="en-IN" smtClean="0"/>
-              <a:t>23-02-2026</a:t>
+              <a:t>24-02-2026</a:t>
             </a:fld>
             <a:endParaRPr lang="en-IN"/>
           </a:p>
@@ -1313,7 +1398,7 @@
           <a:p>
             <a:fld id="{C4F53AEA-B7DC-4A83-8157-9AF768AB38E4}" type="datetimeFigureOut">
               <a:rPr lang="en-IN" smtClean="0"/>
-              <a:t>23-02-2026</a:t>
+              <a:t>24-02-2026</a:t>
             </a:fld>
             <a:endParaRPr lang="en-IN"/>
           </a:p>
@@ -1581,7 +1666,7 @@
           <a:p>
             <a:fld id="{C4F53AEA-B7DC-4A83-8157-9AF768AB38E4}" type="datetimeFigureOut">
               <a:rPr lang="en-IN" smtClean="0"/>
-              <a:t>23-02-2026</a:t>
+              <a:t>24-02-2026</a:t>
             </a:fld>
             <a:endParaRPr lang="en-IN"/>
           </a:p>
@@ -1996,7 +2081,7 @@
           <a:p>
             <a:fld id="{C4F53AEA-B7DC-4A83-8157-9AF768AB38E4}" type="datetimeFigureOut">
               <a:rPr lang="en-IN" smtClean="0"/>
-              <a:t>23-02-2026</a:t>
+              <a:t>24-02-2026</a:t>
             </a:fld>
             <a:endParaRPr lang="en-IN"/>
           </a:p>
@@ -2138,7 +2223,7 @@
           <a:p>
             <a:fld id="{C4F53AEA-B7DC-4A83-8157-9AF768AB38E4}" type="datetimeFigureOut">
               <a:rPr lang="en-IN" smtClean="0"/>
-              <a:t>23-02-2026</a:t>
+              <a:t>24-02-2026</a:t>
             </a:fld>
             <a:endParaRPr lang="en-IN"/>
           </a:p>
@@ -2251,7 +2336,7 @@
           <a:p>
             <a:fld id="{C4F53AEA-B7DC-4A83-8157-9AF768AB38E4}" type="datetimeFigureOut">
               <a:rPr lang="en-IN" smtClean="0"/>
-              <a:t>23-02-2026</a:t>
+              <a:t>24-02-2026</a:t>
             </a:fld>
             <a:endParaRPr lang="en-IN"/>
           </a:p>
@@ -2564,7 +2649,7 @@
           <a:p>
             <a:fld id="{C4F53AEA-B7DC-4A83-8157-9AF768AB38E4}" type="datetimeFigureOut">
               <a:rPr lang="en-IN" smtClean="0"/>
-              <a:t>23-02-2026</a:t>
+              <a:t>24-02-2026</a:t>
             </a:fld>
             <a:endParaRPr lang="en-IN"/>
           </a:p>
@@ -2853,7 +2938,7 @@
           <a:p>
             <a:fld id="{C4F53AEA-B7DC-4A83-8157-9AF768AB38E4}" type="datetimeFigureOut">
               <a:rPr lang="en-IN" smtClean="0"/>
-              <a:t>23-02-2026</a:t>
+              <a:t>24-02-2026</a:t>
             </a:fld>
             <a:endParaRPr lang="en-IN"/>
           </a:p>
@@ -3096,7 +3181,7 @@
           <a:p>
             <a:fld id="{C4F53AEA-B7DC-4A83-8157-9AF768AB38E4}" type="datetimeFigureOut">
               <a:rPr lang="en-IN" smtClean="0"/>
-              <a:t>23-02-2026</a:t>
+              <a:t>24-02-2026</a:t>
             </a:fld>
             <a:endParaRPr lang="en-IN"/>
           </a:p>
@@ -3639,6 +3724,192 @@
 </p:sld>
 </file>
 
+<file path=ppt/slides/slide10.xml><?xml version="1.0" encoding="utf-8"?>
+<p:sld xmlns:a="http://schemas.openxmlformats.org/drawingml/2006/main" xmlns:r="http://schemas.openxmlformats.org/officeDocument/2006/relationships" xmlns:p="http://schemas.openxmlformats.org/presentationml/2006/main">
+  <p:cSld>
+    <p:spTree>
+      <p:nvGrpSpPr>
+        <p:cNvPr id="1" name=""/>
+        <p:cNvGrpSpPr/>
+        <p:nvPr/>
+      </p:nvGrpSpPr>
+      <p:grpSpPr>
+        <a:xfrm>
+          <a:off x="0" y="0"/>
+          <a:ext cx="0" cy="0"/>
+          <a:chOff x="0" y="0"/>
+          <a:chExt cx="0" cy="0"/>
+        </a:xfrm>
+      </p:grpSpPr>
+      <p:sp>
+        <p:nvSpPr>
+          <p:cNvPr id="2" name="Title 1">
+            <a:extLst>
+              <a:ext uri="{FF2B5EF4-FFF2-40B4-BE49-F238E27FC236}">
+                <a16:creationId xmlns:a16="http://schemas.microsoft.com/office/drawing/2014/main" id="{00AA687A-C115-1811-D852-29FE7173F9DE}"/>
+              </a:ext>
+            </a:extLst>
+          </p:cNvPr>
+          <p:cNvSpPr>
+            <a:spLocks noGrp="1"/>
+          </p:cNvSpPr>
+          <p:nvPr>
+            <p:ph type="title"/>
+          </p:nvPr>
+        </p:nvSpPr>
+        <p:spPr/>
+        <p:txBody>
+          <a:bodyPr/>
+          <a:lstStyle/>
+          <a:p>
+            <a:endParaRPr lang="en-IN"/>
+          </a:p>
+        </p:txBody>
+      </p:sp>
+      <p:pic>
+        <p:nvPicPr>
+          <p:cNvPr id="5" name="Content Placeholder 4">
+            <a:extLst>
+              <a:ext uri="{FF2B5EF4-FFF2-40B4-BE49-F238E27FC236}">
+                <a16:creationId xmlns:a16="http://schemas.microsoft.com/office/drawing/2014/main" id="{5E243EB6-C73B-F364-4845-8FFB3BA9499A}"/>
+              </a:ext>
+            </a:extLst>
+          </p:cNvPr>
+          <p:cNvPicPr>
+            <a:picLocks noGrp="1" noChangeAspect="1"/>
+          </p:cNvPicPr>
+          <p:nvPr>
+            <p:ph idx="1"/>
+          </p:nvPr>
+        </p:nvPicPr>
+        <p:blipFill>
+          <a:blip r:embed="rId2">
+            <a:extLst>
+              <a:ext uri="{28A0092B-C50C-407E-A947-70E740481C1C}">
+                <a14:useLocalDpi xmlns:a14="http://schemas.microsoft.com/office/drawing/2010/main" val="0"/>
+              </a:ext>
+            </a:extLst>
+          </a:blip>
+          <a:stretch>
+            <a:fillRect/>
+          </a:stretch>
+        </p:blipFill>
+        <p:spPr>
+          <a:xfrm>
+            <a:off x="727114" y="365125"/>
+            <a:ext cx="10626686" cy="5811838"/>
+          </a:xfrm>
+          <a:prstGeom prst="rect">
+            <a:avLst/>
+          </a:prstGeom>
+        </p:spPr>
+      </p:pic>
+    </p:spTree>
+    <p:extLst>
+      <p:ext uri="{BB962C8B-B14F-4D97-AF65-F5344CB8AC3E}">
+        <p14:creationId xmlns:p14="http://schemas.microsoft.com/office/powerpoint/2010/main" val="3995877536"/>
+      </p:ext>
+    </p:extLst>
+  </p:cSld>
+  <p:clrMapOvr>
+    <a:masterClrMapping/>
+  </p:clrMapOvr>
+</p:sld>
+</file>
+
+<file path=ppt/slides/slide11.xml><?xml version="1.0" encoding="utf-8"?>
+<p:sld xmlns:a="http://schemas.openxmlformats.org/drawingml/2006/main" xmlns:r="http://schemas.openxmlformats.org/officeDocument/2006/relationships" xmlns:p="http://schemas.openxmlformats.org/presentationml/2006/main">
+  <p:cSld>
+    <p:spTree>
+      <p:nvGrpSpPr>
+        <p:cNvPr id="1" name=""/>
+        <p:cNvGrpSpPr/>
+        <p:nvPr/>
+      </p:nvGrpSpPr>
+      <p:grpSpPr>
+        <a:xfrm>
+          <a:off x="0" y="0"/>
+          <a:ext cx="0" cy="0"/>
+          <a:chOff x="0" y="0"/>
+          <a:chExt cx="0" cy="0"/>
+        </a:xfrm>
+      </p:grpSpPr>
+      <p:sp>
+        <p:nvSpPr>
+          <p:cNvPr id="2" name="Title 1">
+            <a:extLst>
+              <a:ext uri="{FF2B5EF4-FFF2-40B4-BE49-F238E27FC236}">
+                <a16:creationId xmlns:a16="http://schemas.microsoft.com/office/drawing/2014/main" id="{4467CE06-0979-2089-777C-918C900F8D72}"/>
+              </a:ext>
+            </a:extLst>
+          </p:cNvPr>
+          <p:cNvSpPr>
+            <a:spLocks noGrp="1"/>
+          </p:cNvSpPr>
+          <p:nvPr>
+            <p:ph type="title"/>
+          </p:nvPr>
+        </p:nvSpPr>
+        <p:spPr/>
+        <p:txBody>
+          <a:bodyPr/>
+          <a:lstStyle/>
+          <a:p>
+            <a:endParaRPr lang="en-IN" dirty="0"/>
+          </a:p>
+        </p:txBody>
+      </p:sp>
+      <p:pic>
+        <p:nvPicPr>
+          <p:cNvPr id="5" name="Content Placeholder 4">
+            <a:extLst>
+              <a:ext uri="{FF2B5EF4-FFF2-40B4-BE49-F238E27FC236}">
+                <a16:creationId xmlns:a16="http://schemas.microsoft.com/office/drawing/2014/main" id="{D0BA6EF4-BEC9-85A0-E3F9-1BA0683226B5}"/>
+              </a:ext>
+            </a:extLst>
+          </p:cNvPr>
+          <p:cNvPicPr>
+            <a:picLocks noGrp="1" noChangeAspect="1"/>
+          </p:cNvPicPr>
+          <p:nvPr>
+            <p:ph idx="1"/>
+          </p:nvPr>
+        </p:nvPicPr>
+        <p:blipFill>
+          <a:blip r:embed="rId2">
+            <a:extLst>
+              <a:ext uri="{28A0092B-C50C-407E-A947-70E740481C1C}">
+                <a14:useLocalDpi xmlns:a14="http://schemas.microsoft.com/office/drawing/2010/main" val="0"/>
+              </a:ext>
+            </a:extLst>
+          </a:blip>
+          <a:stretch>
+            <a:fillRect/>
+          </a:stretch>
+        </p:blipFill>
+        <p:spPr>
+          <a:xfrm>
+            <a:off x="738130" y="365126"/>
+            <a:ext cx="10615670" cy="5811838"/>
+          </a:xfrm>
+          <a:prstGeom prst="rect">
+            <a:avLst/>
+          </a:prstGeom>
+        </p:spPr>
+      </p:pic>
+    </p:spTree>
+    <p:extLst>
+      <p:ext uri="{BB962C8B-B14F-4D97-AF65-F5344CB8AC3E}">
+        <p14:creationId xmlns:p14="http://schemas.microsoft.com/office/powerpoint/2010/main" val="3367923462"/>
+      </p:ext>
+    </p:extLst>
+  </p:cSld>
+  <p:clrMapOvr>
+    <a:masterClrMapping/>
+  </p:clrMapOvr>
+</p:sld>
+</file>
+
 <file path=ppt/slides/slide2.xml><?xml version="1.0" encoding="utf-8"?>
 <p:sld xmlns:a="http://schemas.openxmlformats.org/drawingml/2006/main" xmlns:r="http://schemas.openxmlformats.org/officeDocument/2006/relationships" xmlns:p="http://schemas.openxmlformats.org/presentationml/2006/main">
   <p:cSld>
@@ -3708,7 +3979,7 @@
           <a:p>
             <a:r>
               <a:rPr lang="en-GB" dirty="0"/>
-              <a:t>I am building a system that converts </a:t>
+              <a:t>We are building a system that converts </a:t>
             </a:r>
             <a:r>
               <a:rPr lang="en-GB" b="1" dirty="0"/>
@@ -3756,7 +4027,7 @@
             </a:r>
             <a:r>
               <a:rPr lang="en-GB" dirty="0"/>
-              <a:t> I created the foundation of a knowledge graph that reveals who is working on what, how research themes are distributed, and where overlaps or gaps exist across organisations.</a:t>
+              <a:t> we created the foundation of a knowledge graph that reveals who is working on what, how research themes are distributed, and where overlaps or gaps exist across organisations.</a:t>
             </a:r>
             <a:endParaRPr lang="en-IN" dirty="0"/>
           </a:p>
@@ -4145,9 +4416,6 @@
             <a:endParaRPr lang="en-IN" sz="2400" dirty="0"/>
           </a:p>
           <a:p>
-            <a:pPr marL="0" indent="0">
-              <a:buNone/>
-            </a:pPr>
             <a:r>
               <a:rPr lang="en-IN" sz="2400" b="1" dirty="0"/>
               <a:t>keyphrase_table.html:</a:t>
@@ -4218,6 +4486,99 @@
           <p:cNvPr id="2" name="Title 1">
             <a:extLst>
               <a:ext uri="{FF2B5EF4-FFF2-40B4-BE49-F238E27FC236}">
+                <a16:creationId xmlns:a16="http://schemas.microsoft.com/office/drawing/2014/main" id="{7224B553-92A0-C37A-F44F-FDD12703009B}"/>
+              </a:ext>
+            </a:extLst>
+          </p:cNvPr>
+          <p:cNvSpPr>
+            <a:spLocks noGrp="1"/>
+          </p:cNvSpPr>
+          <p:nvPr>
+            <p:ph type="title"/>
+          </p:nvPr>
+        </p:nvSpPr>
+        <p:spPr/>
+        <p:txBody>
+          <a:bodyPr/>
+          <a:lstStyle/>
+          <a:p>
+            <a:endParaRPr lang="en-IN"/>
+          </a:p>
+        </p:txBody>
+      </p:sp>
+      <p:pic>
+        <p:nvPicPr>
+          <p:cNvPr id="5" name="Content Placeholder 4">
+            <a:extLst>
+              <a:ext uri="{FF2B5EF4-FFF2-40B4-BE49-F238E27FC236}">
+                <a16:creationId xmlns:a16="http://schemas.microsoft.com/office/drawing/2014/main" id="{6C82BB36-626D-2C93-3D8B-8A58A22B8845}"/>
+              </a:ext>
+            </a:extLst>
+          </p:cNvPr>
+          <p:cNvPicPr>
+            <a:picLocks noGrp="1" noChangeAspect="1"/>
+          </p:cNvPicPr>
+          <p:nvPr>
+            <p:ph idx="1"/>
+          </p:nvPr>
+        </p:nvPicPr>
+        <p:blipFill>
+          <a:blip r:embed="rId2">
+            <a:extLst>
+              <a:ext uri="{28A0092B-C50C-407E-A947-70E740481C1C}">
+                <a14:useLocalDpi xmlns:a14="http://schemas.microsoft.com/office/drawing/2010/main" val="0"/>
+              </a:ext>
+            </a:extLst>
+          </a:blip>
+          <a:stretch>
+            <a:fillRect/>
+          </a:stretch>
+        </p:blipFill>
+        <p:spPr>
+          <a:xfrm>
+            <a:off x="838200" y="365125"/>
+            <a:ext cx="10515600" cy="5811838"/>
+          </a:xfrm>
+          <a:prstGeom prst="rect">
+            <a:avLst/>
+          </a:prstGeom>
+        </p:spPr>
+      </p:pic>
+    </p:spTree>
+    <p:extLst>
+      <p:ext uri="{BB962C8B-B14F-4D97-AF65-F5344CB8AC3E}">
+        <p14:creationId xmlns:p14="http://schemas.microsoft.com/office/powerpoint/2010/main" val="1154062688"/>
+      </p:ext>
+    </p:extLst>
+  </p:cSld>
+  <p:clrMapOvr>
+    <a:masterClrMapping/>
+  </p:clrMapOvr>
+</p:sld>
+</file>
+
+<file path=ppt/slides/slide7.xml><?xml version="1.0" encoding="utf-8"?>
+<p:sld xmlns:a="http://schemas.openxmlformats.org/drawingml/2006/main" xmlns:r="http://schemas.openxmlformats.org/officeDocument/2006/relationships" xmlns:p="http://schemas.openxmlformats.org/presentationml/2006/main">
+  <p:cSld>
+    <p:spTree>
+      <p:nvGrpSpPr>
+        <p:cNvPr id="1" name=""/>
+        <p:cNvGrpSpPr/>
+        <p:nvPr/>
+      </p:nvGrpSpPr>
+      <p:grpSpPr>
+        <a:xfrm>
+          <a:off x="0" y="0"/>
+          <a:ext cx="0" cy="0"/>
+          <a:chOff x="0" y="0"/>
+          <a:chExt cx="0" cy="0"/>
+        </a:xfrm>
+      </p:grpSpPr>
+      <p:sp>
+        <p:nvSpPr>
+          <p:cNvPr id="2" name="Title 1">
+            <a:extLst>
+              <a:ext uri="{FF2B5EF4-FFF2-40B4-BE49-F238E27FC236}">
                 <a16:creationId xmlns:a16="http://schemas.microsoft.com/office/drawing/2014/main" id="{9B785BF1-E5A3-DA17-78EC-FD0BC3D3DFB0}"/>
               </a:ext>
             </a:extLst>
@@ -4232,7 +4593,7 @@
         <p:spPr/>
         <p:txBody>
           <a:bodyPr>
-            <a:normAutofit/>
+            <a:normAutofit fontScale="90000"/>
           </a:bodyPr>
           <a:lstStyle/>
           <a:p>
@@ -4242,6 +4603,9 @@
               </a:rPr>
               <a:t>https://github.com/semanticClimate/internship_sC/blob/sakshi-gupta/txt2phrases/knowledge_graph.html</a:t>
             </a:r>
+            <a:br>
+              <a:rPr lang="en-GB" sz="2000" dirty="0"/>
+            </a:br>
             <a:br>
               <a:rPr lang="en-GB" sz="2000" dirty="0"/>
             </a:br>
@@ -4303,7 +4667,7 @@
 </p:sld>
 </file>
 
-<file path=ppt/slides/slide7.xml><?xml version="1.0" encoding="utf-8"?>
+<file path=ppt/slides/slide8.xml><?xml version="1.0" encoding="utf-8"?>
 <p:sld xmlns:a="http://schemas.openxmlformats.org/drawingml/2006/main" xmlns:r="http://schemas.openxmlformats.org/officeDocument/2006/relationships" xmlns:p="http://schemas.openxmlformats.org/presentationml/2006/main">
   <p:cSld>
     <p:spTree>
@@ -4400,7 +4764,7 @@
 </p:sld>
 </file>
 
-<file path=ppt/slides/slide8.xml><?xml version="1.0" encoding="utf-8"?>
+<file path=ppt/slides/slide9.xml><?xml version="1.0" encoding="utf-8"?>
 <p:sld xmlns:a="http://schemas.openxmlformats.org/drawingml/2006/main" xmlns:r="http://schemas.openxmlformats.org/officeDocument/2006/relationships" xmlns:p="http://schemas.openxmlformats.org/presentationml/2006/main">
   <p:cSld>
     <p:spTree>

--- a/txt2phrases/Presentation.pptx
+++ b/txt2phrases/Presentation.pptx
@@ -127,7 +127,7 @@
   <pc:docChgLst>
     <pc:chgData name="sakshi gupta" userId="fe7bf80378c01198" providerId="LiveId" clId="{CD3F5599-86B3-47FA-A744-D924C6D1A3CF}"/>
     <pc:docChg chg="custSel addSld delSld modSld">
-      <pc:chgData name="sakshi gupta" userId="fe7bf80378c01198" providerId="LiveId" clId="{CD3F5599-86B3-47FA-A744-D924C6D1A3CF}" dt="2026-02-25T05:50:03.160" v="650" actId="12"/>
+      <pc:chgData name="sakshi gupta" userId="fe7bf80378c01198" providerId="LiveId" clId="{CD3F5599-86B3-47FA-A744-D924C6D1A3CF}" dt="2026-02-25T06:14:52.797" v="728" actId="27636"/>
       <pc:docMkLst>
         <pc:docMk/>
       </pc:docMkLst>
@@ -223,7 +223,7 @@
         </pc:picChg>
       </pc:sldChg>
       <pc:sldChg chg="modSp new mod">
-        <pc:chgData name="sakshi gupta" userId="fe7bf80378c01198" providerId="LiveId" clId="{CD3F5599-86B3-47FA-A744-D924C6D1A3CF}" dt="2026-02-23T15:54:44.147" v="595" actId="12"/>
+        <pc:chgData name="sakshi gupta" userId="fe7bf80378c01198" providerId="LiveId" clId="{CD3F5599-86B3-47FA-A744-D924C6D1A3CF}" dt="2026-02-25T06:14:52.797" v="728" actId="27636"/>
         <pc:sldMkLst>
           <pc:docMk/>
           <pc:sldMk cId="1727964981" sldId="262"/>
@@ -237,7 +237,7 @@
           </ac:spMkLst>
         </pc:spChg>
         <pc:spChg chg="mod">
-          <ac:chgData name="sakshi gupta" userId="fe7bf80378c01198" providerId="LiveId" clId="{CD3F5599-86B3-47FA-A744-D924C6D1A3CF}" dt="2026-02-23T15:54:44.147" v="595" actId="12"/>
+          <ac:chgData name="sakshi gupta" userId="fe7bf80378c01198" providerId="LiveId" clId="{CD3F5599-86B3-47FA-A744-D924C6D1A3CF}" dt="2026-02-25T06:14:52.797" v="728" actId="27636"/>
           <ac:spMkLst>
             <pc:docMk/>
             <pc:sldMk cId="1727964981" sldId="262"/>
@@ -512,7 +512,7 @@
           <a:p>
             <a:fld id="{C4F53AEA-B7DC-4A83-8157-9AF768AB38E4}" type="datetimeFigureOut">
               <a:rPr lang="en-IN" smtClean="0"/>
-              <a:t>24-02-2026</a:t>
+              <a:t>25-02-2026</a:t>
             </a:fld>
             <a:endParaRPr lang="en-IN"/>
           </a:p>
@@ -712,7 +712,7 @@
           <a:p>
             <a:fld id="{C4F53AEA-B7DC-4A83-8157-9AF768AB38E4}" type="datetimeFigureOut">
               <a:rPr lang="en-IN" smtClean="0"/>
-              <a:t>24-02-2026</a:t>
+              <a:t>25-02-2026</a:t>
             </a:fld>
             <a:endParaRPr lang="en-IN"/>
           </a:p>
@@ -922,7 +922,7 @@
           <a:p>
             <a:fld id="{C4F53AEA-B7DC-4A83-8157-9AF768AB38E4}" type="datetimeFigureOut">
               <a:rPr lang="en-IN" smtClean="0"/>
-              <a:t>24-02-2026</a:t>
+              <a:t>25-02-2026</a:t>
             </a:fld>
             <a:endParaRPr lang="en-IN"/>
           </a:p>
@@ -1122,7 +1122,7 @@
           <a:p>
             <a:fld id="{C4F53AEA-B7DC-4A83-8157-9AF768AB38E4}" type="datetimeFigureOut">
               <a:rPr lang="en-IN" smtClean="0"/>
-              <a:t>24-02-2026</a:t>
+              <a:t>25-02-2026</a:t>
             </a:fld>
             <a:endParaRPr lang="en-IN"/>
           </a:p>
@@ -1398,7 +1398,7 @@
           <a:p>
             <a:fld id="{C4F53AEA-B7DC-4A83-8157-9AF768AB38E4}" type="datetimeFigureOut">
               <a:rPr lang="en-IN" smtClean="0"/>
-              <a:t>24-02-2026</a:t>
+              <a:t>25-02-2026</a:t>
             </a:fld>
             <a:endParaRPr lang="en-IN"/>
           </a:p>
@@ -1666,7 +1666,7 @@
           <a:p>
             <a:fld id="{C4F53AEA-B7DC-4A83-8157-9AF768AB38E4}" type="datetimeFigureOut">
               <a:rPr lang="en-IN" smtClean="0"/>
-              <a:t>24-02-2026</a:t>
+              <a:t>25-02-2026</a:t>
             </a:fld>
             <a:endParaRPr lang="en-IN"/>
           </a:p>
@@ -2081,7 +2081,7 @@
           <a:p>
             <a:fld id="{C4F53AEA-B7DC-4A83-8157-9AF768AB38E4}" type="datetimeFigureOut">
               <a:rPr lang="en-IN" smtClean="0"/>
-              <a:t>24-02-2026</a:t>
+              <a:t>25-02-2026</a:t>
             </a:fld>
             <a:endParaRPr lang="en-IN"/>
           </a:p>
@@ -2223,7 +2223,7 @@
           <a:p>
             <a:fld id="{C4F53AEA-B7DC-4A83-8157-9AF768AB38E4}" type="datetimeFigureOut">
               <a:rPr lang="en-IN" smtClean="0"/>
-              <a:t>24-02-2026</a:t>
+              <a:t>25-02-2026</a:t>
             </a:fld>
             <a:endParaRPr lang="en-IN"/>
           </a:p>
@@ -2336,7 +2336,7 @@
           <a:p>
             <a:fld id="{C4F53AEA-B7DC-4A83-8157-9AF768AB38E4}" type="datetimeFigureOut">
               <a:rPr lang="en-IN" smtClean="0"/>
-              <a:t>24-02-2026</a:t>
+              <a:t>25-02-2026</a:t>
             </a:fld>
             <a:endParaRPr lang="en-IN"/>
           </a:p>
@@ -2649,7 +2649,7 @@
           <a:p>
             <a:fld id="{C4F53AEA-B7DC-4A83-8157-9AF768AB38E4}" type="datetimeFigureOut">
               <a:rPr lang="en-IN" smtClean="0"/>
-              <a:t>24-02-2026</a:t>
+              <a:t>25-02-2026</a:t>
             </a:fld>
             <a:endParaRPr lang="en-IN"/>
           </a:p>
@@ -2938,7 +2938,7 @@
           <a:p>
             <a:fld id="{C4F53AEA-B7DC-4A83-8157-9AF768AB38E4}" type="datetimeFigureOut">
               <a:rPr lang="en-IN" smtClean="0"/>
-              <a:t>24-02-2026</a:t>
+              <a:t>25-02-2026</a:t>
             </a:fld>
             <a:endParaRPr lang="en-IN"/>
           </a:p>
@@ -3181,7 +3181,7 @@
           <a:p>
             <a:fld id="{C4F53AEA-B7DC-4A83-8157-9AF768AB38E4}" type="datetimeFigureOut">
               <a:rPr lang="en-IN" smtClean="0"/>
-              <a:t>24-02-2026</a:t>
+              <a:t>25-02-2026</a:t>
             </a:fld>
             <a:endParaRPr lang="en-IN"/>
           </a:p>
@@ -4828,28 +4828,52 @@
         </p:nvSpPr>
         <p:spPr/>
         <p:txBody>
-          <a:bodyPr/>
-          <a:lstStyle/>
+          <a:bodyPr>
+            <a:normAutofit fontScale="92500" lnSpcReduction="20000"/>
+          </a:bodyPr>
+          <a:lstStyle/>
+          <a:p>
+            <a:r>
+              <a:rPr lang="en-IN" dirty="0" err="1">
+                <a:hlinkClick r:id="rId2"/>
+              </a:rPr>
+              <a:t>Encyclopedia</a:t>
+            </a:r>
+            <a:endParaRPr lang="en-IN" dirty="0">
+              <a:hlinkClick r:id="rId2"/>
+            </a:endParaRPr>
+          </a:p>
           <a:p>
             <a:r>
               <a:rPr lang="en-IN" dirty="0">
                 <a:hlinkClick r:id="rId2"/>
               </a:rPr>
-              <a:t>https://github.com/semanticClimate/internship_sC/blob/sakshi-gupta/txt2phrases/output.md</a:t>
-            </a:r>
-            <a:endParaRPr lang="en-IN" dirty="0"/>
-          </a:p>
-          <a:p>
-            <a:pPr marL="0" indent="0">
-              <a:buNone/>
-            </a:pPr>
-            <a:endParaRPr lang="en-IN" dirty="0"/>
-          </a:p>
-          <a:p>
+              <a:t> </a:t>
+            </a:r>
             <a:r>
               <a:rPr lang="en-IN" dirty="0">
                 <a:hlinkClick r:id="rId3"/>
               </a:rPr>
+              <a:t>https://github.com/semanticClimate/internship_sC/blob/sakshi-gupta/txt2phrases/wordslist_dict%20(3).html</a:t>
+            </a:r>
+            <a:endParaRPr lang="en-IN" dirty="0"/>
+          </a:p>
+          <a:p>
+            <a:endParaRPr lang="en-IN" dirty="0"/>
+          </a:p>
+          <a:p>
+            <a:r>
+              <a:rPr lang="en-IN" dirty="0">
+                <a:hlinkClick r:id="rId4"/>
+              </a:rPr>
+              <a:t>Knowledge graph</a:t>
+            </a:r>
+          </a:p>
+          <a:p>
+            <a:r>
+              <a:rPr lang="en-IN" dirty="0">
+                <a:hlinkClick r:id="rId4"/>
+              </a:rPr>
               <a:t>https://github.com/semanticClimate/internship_sC/blob/sakshi-gupta/txt2phrases/encyclopedia_kg_visual%20(2).html</a:t>
             </a:r>
             <a:endParaRPr lang="en-IN" dirty="0"/>
@@ -4869,7 +4893,7 @@
           <a:p>
             <a:r>
               <a:rPr lang="en-GB" dirty="0">
-                <a:hlinkClick r:id="rId4"/>
+                <a:hlinkClick r:id="rId5"/>
               </a:rPr>
               <a:t>https://github.com/semanticClimate/txt2phrases/blob/reports/Examples/otvirare/india_plant_reports/merged_keywords.csv</a:t>
             </a:r>
